--- a/docs/演示/业务态势.pptx
+++ b/docs/演示/业务态势.pptx
@@ -3081,6 +3081,14 @@
 <file path=ppt/slides/slide1.xml><?xml version="1.0" encoding="utf-8"?>
 <p:sld xmlns:a="http://schemas.openxmlformats.org/drawingml/2006/main" xmlns:p="http://schemas.openxmlformats.org/presentationml/2006/main" xmlns:r="http://schemas.openxmlformats.org/officeDocument/2006/relationships">
   <p:cSld>
+    <p:bg>
+      <p:bgPr>
+        <a:solidFill>
+          <a:srgbClr val="1A2B4A"/>
+        </a:solidFill>
+        <a:effectLst/>
+      </p:bgPr>
+    </p:bg>
     <p:spTree>
       <p:nvGrpSpPr>
         <p:cNvPr id="1" name=""/>
@@ -3097,51 +3105,7 @@
         <p:spPr>
           <a:xfrm>
             <a:off x="0" y="0"/>
-            <a:ext cx="9144000" cy="6858000"/>
-          </a:xfrm>
-          <a:prstGeom prst="rect">
-            <a:avLst/>
-          </a:prstGeom>
-          <a:solidFill>
-            <a:srgbClr val="ECEBE7"/>
-          </a:solidFill>
-          <a:ln>
-            <a:noFill/>
-          </a:ln>
-          <a:effectLst/>
-        </p:spPr>
-        <p:style>
-          <a:lnRef idx="1">
-            <a:schemeClr val="accent1"/>
-          </a:lnRef>
-          <a:fillRef idx="3">
-            <a:schemeClr val="accent1"/>
-          </a:fillRef>
-          <a:effectRef idx="2">
-            <a:schemeClr val="accent1"/>
-          </a:effectRef>
-          <a:fontRef idx="minor">
-            <a:schemeClr val="lt1"/>
-          </a:fontRef>
-        </p:style>
-        <p:txBody>
-          <a:bodyPr rtlCol="0" anchor="ctr"/>
-          <a:lstStyle/>
-          <a:p>
-            <a:pPr algn="ctr"/>
-          </a:p>
-        </p:txBody>
-      </p:sp>
-      <p:sp>
-        <p:nvSpPr>
-          <p:cNvPr id="3" name="Rectangle 2"/>
-          <p:cNvSpPr/>
-          <p:nvPr/>
-        </p:nvSpPr>
-        <p:spPr>
-          <a:xfrm>
-            <a:off x="0" y="0"/>
-            <a:ext cx="9144000" cy="82296"/>
+            <a:ext cx="9144000" cy="109728"/>
           </a:xfrm>
           <a:prstGeom prst="rect">
             <a:avLst/>
@@ -3178,14 +3142,14 @@
       </p:sp>
       <p:sp>
         <p:nvSpPr>
-          <p:cNvPr id="4" name="TextBox 3"/>
+          <p:cNvPr id="3" name="TextBox 2"/>
           <p:cNvSpPr txBox="1"/>
           <p:nvPr/>
         </p:nvSpPr>
         <p:spPr>
           <a:xfrm>
-            <a:off x="502920" y="274320"/>
-            <a:ext cx="8138160" cy="384048"/>
+            <a:off x="548640" y="274320"/>
+            <a:ext cx="8138160" cy="365760"/>
           </a:xfrm>
           <a:prstGeom prst="rect">
             <a:avLst/>
@@ -3193,7 +3157,7 @@
           <a:noFill/>
         </p:spPr>
         <p:txBody>
-          <a:bodyPr wrap="square" anchor="t" lIns="0" rIns="0" tIns="0" bIns="0">
+          <a:bodyPr wrap="square" lIns="0" rIns="0" tIns="0" bIns="0">
             <a:spAutoFit/>
           </a:bodyPr>
           <a:lstStyle/>
@@ -3204,37 +3168,26 @@
               </a:lnSpc>
             </a:pPr>
             <a:r>
-              <a:rPr sz="2600" b="1">
+              <a:rPr sz="2200" b="1">
                 <a:solidFill>
-                  <a:srgbClr val="1A2B4A"/>
+                  <a:srgbClr val="FFFFFF"/>
                 </a:solidFill>
                 <a:latin typeface="Microsoft YaHei"/>
-                <a:ea typeface="Microsoft YaHei"/>
               </a:rPr>
-              <a:t>业务态势</a:t>
-            </a:r>
-            <a:r>
-              <a:rPr sz="1500" b="0">
-                <a:solidFill>
-                  <a:srgbClr val="1E508C"/>
-                </a:solidFill>
-                <a:latin typeface="Microsoft YaHei"/>
-                <a:ea typeface="Microsoft YaHei"/>
-              </a:rPr>
-              <a:t>　·　密信 / 签阅 / 境外通联</a:t>
-            </a:r>
-          </a:p>
-        </p:txBody>
-      </p:sp>
-      <p:sp>
-        <p:nvSpPr>
-          <p:cNvPr id="5" name="TextBox 4"/>
+              <a:t>业务态势　·　密信 / 签阅 / 境外通联</a:t>
+            </a:r>
+          </a:p>
+        </p:txBody>
+      </p:sp>
+      <p:sp>
+        <p:nvSpPr>
+          <p:cNvPr id="4" name="TextBox 3"/>
           <p:cNvSpPr txBox="1"/>
           <p:nvPr/>
         </p:nvSpPr>
         <p:spPr>
           <a:xfrm>
-            <a:off x="502920" y="694944"/>
+            <a:off x="548640" y="731520"/>
             <a:ext cx="8138160" cy="274320"/>
           </a:xfrm>
           <a:prstGeom prst="rect">
@@ -3243,7 +3196,7 @@
           <a:noFill/>
         </p:spPr>
         <p:txBody>
-          <a:bodyPr wrap="square" anchor="t" lIns="0" rIns="0" tIns="0" bIns="0">
+          <a:bodyPr wrap="square" lIns="0" rIns="0" tIns="0" bIns="0">
             <a:spAutoFit/>
           </a:bodyPr>
           <a:lstStyle/>
@@ -3254,12 +3207,11 @@
               </a:lnSpc>
             </a:pPr>
             <a:r>
-              <a:rPr sz="1150" b="0">
+              <a:rPr sz="1300" b="0">
                 <a:solidFill>
-                  <a:srgbClr val="595B5F"/>
+                  <a:srgbClr val="9FB3CC"/>
                 </a:solidFill>
                 <a:latin typeface="Microsoft YaHei"/>
-                <a:ea typeface="Microsoft YaHei"/>
               </a:rPr>
               <a:t>业务主题态势聚焦密信传输、签阅流转与境外通联三大核心业务，提供业务量统计、流转状态追踪与链路健康监测。</a:t>
             </a:r>
@@ -3268,14 +3220,14 @@
       </p:sp>
       <p:sp>
         <p:nvSpPr>
-          <p:cNvPr id="6" name="TextBox 5"/>
+          <p:cNvPr id="5" name="TextBox 4"/>
           <p:cNvSpPr txBox="1"/>
           <p:nvPr/>
         </p:nvSpPr>
         <p:spPr>
           <a:xfrm>
-            <a:off x="502920" y="1078992"/>
-            <a:ext cx="320040" cy="310896"/>
+            <a:off x="548640" y="1097280"/>
+            <a:ext cx="7863840" cy="320040"/>
           </a:xfrm>
           <a:prstGeom prst="rect">
             <a:avLst/>
@@ -3283,7 +3235,7 @@
           <a:noFill/>
         </p:spPr>
         <p:txBody>
-          <a:bodyPr wrap="square" anchor="t" lIns="0" rIns="0" tIns="0" bIns="0">
+          <a:bodyPr wrap="square" lIns="0" rIns="0" tIns="0" bIns="0">
             <a:spAutoFit/>
           </a:bodyPr>
           <a:lstStyle/>
@@ -3294,28 +3246,43 @@
               </a:lnSpc>
             </a:pPr>
             <a:r>
-              <a:rPr sz="1400" b="1">
+              <a:rPr sz="1300" b="1">
                 <a:solidFill>
                   <a:srgbClr val="2E7D32"/>
                 </a:solidFill>
                 <a:latin typeface="Microsoft YaHei"/>
-                <a:ea typeface="Microsoft YaHei"/>
               </a:rPr>
-              <a:t>✓</a:t>
-            </a:r>
-          </a:p>
-        </p:txBody>
-      </p:sp>
-      <p:sp>
-        <p:nvSpPr>
-          <p:cNvPr id="7" name="TextBox 6"/>
+              <a:t>✓ </a:t>
+            </a:r>
+          </a:p>
+          <a:p>
+            <a:pPr algn="l">
+              <a:lnSpc>
+                <a:spcPct val="100000"/>
+              </a:lnSpc>
+            </a:pPr>
+            <a:r>
+              <a:rPr sz="1300" b="0">
+                <a:solidFill>
+                  <a:srgbClr val="FFFFFF"/>
+                </a:solidFill>
+                <a:latin typeface="Microsoft YaHei"/>
+              </a:rPr>
+              <a:t>密信态势：用户登录/登出状态监测，消息与文件收发量统计，分时趋势及国家排行实时展示；</a:t>
+            </a:r>
+          </a:p>
+        </p:txBody>
+      </p:sp>
+      <p:sp>
+        <p:nvSpPr>
+          <p:cNvPr id="6" name="TextBox 5"/>
           <p:cNvSpPr txBox="1"/>
           <p:nvPr/>
         </p:nvSpPr>
         <p:spPr>
           <a:xfrm>
-            <a:off x="841248" y="1078992"/>
-            <a:ext cx="1188720" cy="310896"/>
+            <a:off x="548640" y="1508760"/>
+            <a:ext cx="7863840" cy="320040"/>
           </a:xfrm>
           <a:prstGeom prst="rect">
             <a:avLst/>
@@ -3323,7 +3290,7 @@
           <a:noFill/>
         </p:spPr>
         <p:txBody>
-          <a:bodyPr wrap="square" anchor="t" lIns="0" rIns="0" tIns="0" bIns="0">
+          <a:bodyPr wrap="square" lIns="0" rIns="0" tIns="0" bIns="0">
             <a:spAutoFit/>
           </a:bodyPr>
           <a:lstStyle/>
@@ -3334,28 +3301,43 @@
               </a:lnSpc>
             </a:pPr>
             <a:r>
-              <a:rPr sz="1350" b="1">
+              <a:rPr sz="1300" b="1">
                 <a:solidFill>
-                  <a:srgbClr val="1E508C"/>
+                  <a:srgbClr val="2E7D32"/>
                 </a:solidFill>
                 <a:latin typeface="Microsoft YaHei"/>
-                <a:ea typeface="Microsoft YaHei"/>
               </a:rPr>
-              <a:t>密信态势：</a:t>
-            </a:r>
-          </a:p>
-        </p:txBody>
-      </p:sp>
-      <p:sp>
-        <p:nvSpPr>
-          <p:cNvPr id="8" name="TextBox 7"/>
+              <a:t>✓ </a:t>
+            </a:r>
+          </a:p>
+          <a:p>
+            <a:pPr algn="l">
+              <a:lnSpc>
+                <a:spcPct val="100000"/>
+              </a:lnSpc>
+            </a:pPr>
+            <a:r>
+              <a:rPr sz="1300" b="0">
+                <a:solidFill>
+                  <a:srgbClr val="FFFFFF"/>
+                </a:solidFill>
+                <a:latin typeface="Microsoft YaHei"/>
+              </a:rPr>
+              <a:t>签阅态势：收到、已处理、待处理、异常/退回流转状态统计，处理趋势及国家排行可视化；</a:t>
+            </a:r>
+          </a:p>
+        </p:txBody>
+      </p:sp>
+      <p:sp>
+        <p:nvSpPr>
+          <p:cNvPr id="7" name="TextBox 6"/>
           <p:cNvSpPr txBox="1"/>
           <p:nvPr/>
         </p:nvSpPr>
         <p:spPr>
           <a:xfrm>
-            <a:off x="2048256" y="1078992"/>
-            <a:ext cx="6583680" cy="310896"/>
+            <a:off x="548640" y="1920240"/>
+            <a:ext cx="7863840" cy="320040"/>
           </a:xfrm>
           <a:prstGeom prst="rect">
             <a:avLst/>
@@ -3363,7 +3345,7 @@
           <a:noFill/>
         </p:spPr>
         <p:txBody>
-          <a:bodyPr wrap="square" anchor="t" lIns="0" rIns="0" tIns="0" bIns="0">
+          <a:bodyPr wrap="square" lIns="0" rIns="0" tIns="0" bIns="0">
             <a:spAutoFit/>
           </a:bodyPr>
           <a:lstStyle/>
@@ -3374,39 +3356,15 @@
               </a:lnSpc>
             </a:pPr>
             <a:r>
-              <a:rPr sz="1250" b="0">
+              <a:rPr sz="1300" b="1">
                 <a:solidFill>
-                  <a:srgbClr val="2B2B2B"/>
+                  <a:srgbClr val="2E7D32"/>
                 </a:solidFill>
                 <a:latin typeface="Microsoft YaHei"/>
-                <a:ea typeface="Microsoft YaHei"/>
               </a:rPr>
-              <a:t>支持密信用户登录/登出状态监测，消息与文件收发量统计，分时业务趋势及国家排行实时展示；</a:t>
-            </a:r>
-          </a:p>
-        </p:txBody>
-      </p:sp>
-      <p:sp>
-        <p:nvSpPr>
-          <p:cNvPr id="9" name="TextBox 8"/>
-          <p:cNvSpPr txBox="1"/>
-          <p:nvPr/>
-        </p:nvSpPr>
-        <p:spPr>
-          <a:xfrm>
-            <a:off x="502920" y="1591056"/>
-            <a:ext cx="320040" cy="310896"/>
-          </a:xfrm>
-          <a:prstGeom prst="rect">
-            <a:avLst/>
-          </a:prstGeom>
-          <a:noFill/>
-        </p:spPr>
-        <p:txBody>
-          <a:bodyPr wrap="square" anchor="t" lIns="0" rIns="0" tIns="0" bIns="0">
-            <a:spAutoFit/>
-          </a:bodyPr>
-          <a:lstStyle/>
+              <a:t>✓ </a:t>
+            </a:r>
+          </a:p>
           <a:p>
             <a:pPr algn="l">
               <a:lnSpc>
@@ -3414,234 +3372,33 @@
               </a:lnSpc>
             </a:pPr>
             <a:r>
-              <a:rPr sz="1400" b="1">
+              <a:rPr sz="1300" b="0">
                 <a:solidFill>
-                  <a:srgbClr val="2E7D32"/>
+                  <a:srgbClr val="FFFFFF"/>
                 </a:solidFill>
                 <a:latin typeface="Microsoft YaHei"/>
-                <a:ea typeface="Microsoft YaHei"/>
               </a:rPr>
-              <a:t>✓</a:t>
-            </a:r>
-          </a:p>
-        </p:txBody>
-      </p:sp>
-      <p:sp>
-        <p:nvSpPr>
-          <p:cNvPr id="10" name="TextBox 9"/>
-          <p:cNvSpPr txBox="1"/>
+              <a:t>境外通联：共享链路（50 Mbps）上下行速率、利用率、累计流量与峰值监测，国家流量占比展示。</a:t>
+            </a:r>
+          </a:p>
+        </p:txBody>
+      </p:sp>
+      <p:sp>
+        <p:nvSpPr>
+          <p:cNvPr id="8" name="Rectangle 7"/>
+          <p:cNvSpPr/>
           <p:nvPr/>
         </p:nvSpPr>
         <p:spPr>
           <a:xfrm>
-            <a:off x="841248" y="1591056"/>
-            <a:ext cx="1188720" cy="310896"/>
-          </a:xfrm>
-          <a:prstGeom prst="rect">
-            <a:avLst/>
-          </a:prstGeom>
-          <a:noFill/>
-        </p:spPr>
-        <p:txBody>
-          <a:bodyPr wrap="square" anchor="t" lIns="0" rIns="0" tIns="0" bIns="0">
-            <a:spAutoFit/>
-          </a:bodyPr>
-          <a:lstStyle/>
-          <a:p>
-            <a:pPr algn="l">
-              <a:lnSpc>
-                <a:spcPct val="100000"/>
-              </a:lnSpc>
-            </a:pPr>
-            <a:r>
-              <a:rPr sz="1350" b="1">
-                <a:solidFill>
-                  <a:srgbClr val="1E508C"/>
-                </a:solidFill>
-                <a:latin typeface="Microsoft YaHei"/>
-                <a:ea typeface="Microsoft YaHei"/>
-              </a:rPr>
-              <a:t>签阅态势：</a:t>
-            </a:r>
-          </a:p>
-        </p:txBody>
-      </p:sp>
-      <p:sp>
-        <p:nvSpPr>
-          <p:cNvPr id="11" name="TextBox 10"/>
-          <p:cNvSpPr txBox="1"/>
-          <p:nvPr/>
-        </p:nvSpPr>
-        <p:spPr>
-          <a:xfrm>
-            <a:off x="2048256" y="1591056"/>
-            <a:ext cx="6583680" cy="310896"/>
-          </a:xfrm>
-          <a:prstGeom prst="rect">
-            <a:avLst/>
-          </a:prstGeom>
-          <a:noFill/>
-        </p:spPr>
-        <p:txBody>
-          <a:bodyPr wrap="square" anchor="t" lIns="0" rIns="0" tIns="0" bIns="0">
-            <a:spAutoFit/>
-          </a:bodyPr>
-          <a:lstStyle/>
-          <a:p>
-            <a:pPr algn="l">
-              <a:lnSpc>
-                <a:spcPct val="100000"/>
-              </a:lnSpc>
-            </a:pPr>
-            <a:r>
-              <a:rPr sz="1250" b="0">
-                <a:solidFill>
-                  <a:srgbClr val="2B2B2B"/>
-                </a:solidFill>
-                <a:latin typeface="Microsoft YaHei"/>
-                <a:ea typeface="Microsoft YaHei"/>
-              </a:rPr>
-              <a:t>支持签阅文件收到、已处理、待处理、异常/退回流转状态统计，处理趋势及国家排行可视化；</a:t>
-            </a:r>
-          </a:p>
-        </p:txBody>
-      </p:sp>
-      <p:sp>
-        <p:nvSpPr>
-          <p:cNvPr id="12" name="TextBox 11"/>
-          <p:cNvSpPr txBox="1"/>
-          <p:nvPr/>
-        </p:nvSpPr>
-        <p:spPr>
-          <a:xfrm>
-            <a:off x="502920" y="2103120"/>
-            <a:ext cx="320040" cy="310896"/>
-          </a:xfrm>
-          <a:prstGeom prst="rect">
-            <a:avLst/>
-          </a:prstGeom>
-          <a:noFill/>
-        </p:spPr>
-        <p:txBody>
-          <a:bodyPr wrap="square" anchor="t" lIns="0" rIns="0" tIns="0" bIns="0">
-            <a:spAutoFit/>
-          </a:bodyPr>
-          <a:lstStyle/>
-          <a:p>
-            <a:pPr algn="l">
-              <a:lnSpc>
-                <a:spcPct val="100000"/>
-              </a:lnSpc>
-            </a:pPr>
-            <a:r>
-              <a:rPr sz="1400" b="1">
-                <a:solidFill>
-                  <a:srgbClr val="2E7D32"/>
-                </a:solidFill>
-                <a:latin typeface="Microsoft YaHei"/>
-                <a:ea typeface="Microsoft YaHei"/>
-              </a:rPr>
-              <a:t>✓</a:t>
-            </a:r>
-          </a:p>
-        </p:txBody>
-      </p:sp>
-      <p:sp>
-        <p:nvSpPr>
-          <p:cNvPr id="13" name="TextBox 12"/>
-          <p:cNvSpPr txBox="1"/>
-          <p:nvPr/>
-        </p:nvSpPr>
-        <p:spPr>
-          <a:xfrm>
-            <a:off x="841248" y="2103120"/>
-            <a:ext cx="1188720" cy="310896"/>
-          </a:xfrm>
-          <a:prstGeom prst="rect">
-            <a:avLst/>
-          </a:prstGeom>
-          <a:noFill/>
-        </p:spPr>
-        <p:txBody>
-          <a:bodyPr wrap="square" anchor="t" lIns="0" rIns="0" tIns="0" bIns="0">
-            <a:spAutoFit/>
-          </a:bodyPr>
-          <a:lstStyle/>
-          <a:p>
-            <a:pPr algn="l">
-              <a:lnSpc>
-                <a:spcPct val="100000"/>
-              </a:lnSpc>
-            </a:pPr>
-            <a:r>
-              <a:rPr sz="1350" b="1">
-                <a:solidFill>
-                  <a:srgbClr val="1E508C"/>
-                </a:solidFill>
-                <a:latin typeface="Microsoft YaHei"/>
-                <a:ea typeface="Microsoft YaHei"/>
-              </a:rPr>
-              <a:t>境外通联：</a:t>
-            </a:r>
-          </a:p>
-        </p:txBody>
-      </p:sp>
-      <p:sp>
-        <p:nvSpPr>
-          <p:cNvPr id="14" name="TextBox 13"/>
-          <p:cNvSpPr txBox="1"/>
-          <p:nvPr/>
-        </p:nvSpPr>
-        <p:spPr>
-          <a:xfrm>
-            <a:off x="2048256" y="2103120"/>
-            <a:ext cx="6583680" cy="310896"/>
-          </a:xfrm>
-          <a:prstGeom prst="rect">
-            <a:avLst/>
-          </a:prstGeom>
-          <a:noFill/>
-        </p:spPr>
-        <p:txBody>
-          <a:bodyPr wrap="square" anchor="t" lIns="0" rIns="0" tIns="0" bIns="0">
-            <a:spAutoFit/>
-          </a:bodyPr>
-          <a:lstStyle/>
-          <a:p>
-            <a:pPr algn="l">
-              <a:lnSpc>
-                <a:spcPct val="100000"/>
-              </a:lnSpc>
-            </a:pPr>
-            <a:r>
-              <a:rPr sz="1250" b="0">
-                <a:solidFill>
-                  <a:srgbClr val="2B2B2B"/>
-                </a:solidFill>
-                <a:latin typeface="Microsoft YaHei"/>
-                <a:ea typeface="Microsoft YaHei"/>
-              </a:rPr>
-              <a:t>支持境外共享链路（50 Mbps）上行/下行速率、链路利用率、累计流量与峰值监测，展示各国家流量占比。</a:t>
-            </a:r>
-          </a:p>
-        </p:txBody>
-      </p:sp>
-      <p:sp>
-        <p:nvSpPr>
-          <p:cNvPr id="15" name="Rectangle 14"/>
-          <p:cNvSpPr/>
-          <p:nvPr/>
-        </p:nvSpPr>
-        <p:spPr>
-          <a:xfrm>
-            <a:off x="502920" y="2724912"/>
+            <a:off x="548640" y="2606040"/>
             <a:ext cx="8138160" cy="18288"/>
           </a:xfrm>
           <a:prstGeom prst="rect">
             <a:avLst/>
           </a:prstGeom>
           <a:solidFill>
-            <a:srgbClr val="C9C6C2"/>
+            <a:srgbClr val="233B63"/>
           </a:solidFill>
           <a:ln>
             <a:noFill/>
@@ -3670,55 +3427,9 @@
           </a:p>
         </p:txBody>
       </p:sp>
-      <p:sp>
-        <p:nvSpPr>
-          <p:cNvPr id="16" name="Rectangle 15"/>
-          <p:cNvSpPr/>
-          <p:nvPr/>
-        </p:nvSpPr>
-        <p:spPr>
-          <a:xfrm>
-            <a:off x="448056" y="2889504"/>
-            <a:ext cx="4041648" cy="2321433"/>
-          </a:xfrm>
-          <a:prstGeom prst="rect">
-            <a:avLst/>
-          </a:prstGeom>
-          <a:solidFill>
-            <a:srgbClr val="FFFFFF"/>
-          </a:solidFill>
-          <a:ln w="12700">
-            <a:solidFill>
-              <a:srgbClr val="C9C6C2"/>
-            </a:solidFill>
-          </a:ln>
-          <a:effectLst/>
-        </p:spPr>
-        <p:style>
-          <a:lnRef idx="1">
-            <a:schemeClr val="accent1"/>
-          </a:lnRef>
-          <a:fillRef idx="3">
-            <a:schemeClr val="accent1"/>
-          </a:fillRef>
-          <a:effectRef idx="2">
-            <a:schemeClr val="accent1"/>
-          </a:effectRef>
-          <a:fontRef idx="minor">
-            <a:schemeClr val="lt1"/>
-          </a:fontRef>
-        </p:style>
-        <p:txBody>
-          <a:bodyPr rtlCol="0" anchor="ctr"/>
-          <a:lstStyle/>
-          <a:p>
-            <a:pPr algn="ctr"/>
-          </a:p>
-        </p:txBody>
-      </p:sp>
       <p:pic>
         <p:nvPicPr>
-          <p:cNvPr id="17" name="Picture 16" descr="business-1920.png"/>
+          <p:cNvPr id="9" name="Picture 8" descr="business-1920.png"/>
           <p:cNvPicPr>
             <a:picLocks noChangeAspect="1"/>
           </p:cNvPicPr>
@@ -3732,8 +3443,8 @@
         </p:blipFill>
         <p:spPr>
           <a:xfrm>
-            <a:off x="502920" y="2944368"/>
-            <a:ext cx="3931920" cy="2211705"/>
+            <a:off x="1554480" y="2788920"/>
+            <a:ext cx="6035040" cy="3394710"/>
           </a:xfrm>
           <a:prstGeom prst="rect">
             <a:avLst/>
@@ -3742,14 +3453,14 @@
       </p:pic>
       <p:sp>
         <p:nvSpPr>
-          <p:cNvPr id="18" name="TextBox 17"/>
+          <p:cNvPr id="10" name="TextBox 9"/>
           <p:cNvSpPr txBox="1"/>
           <p:nvPr/>
         </p:nvSpPr>
         <p:spPr>
           <a:xfrm>
-            <a:off x="502920" y="5302377"/>
-            <a:ext cx="3931920" cy="274320"/>
+            <a:off x="548640" y="6263640"/>
+            <a:ext cx="8138160" cy="365760"/>
           </a:xfrm>
           <a:prstGeom prst="rect">
             <a:avLst/>
@@ -3757,237 +3468,7 @@
           <a:noFill/>
         </p:spPr>
         <p:txBody>
-          <a:bodyPr wrap="square" anchor="t" lIns="0" rIns="0" tIns="0" bIns="0">
-            <a:spAutoFit/>
-          </a:bodyPr>
-          <a:lstStyle/>
-          <a:p>
-            <a:pPr algn="ctr">
-              <a:lnSpc>
-                <a:spcPct val="100000"/>
-              </a:lnSpc>
-            </a:pPr>
-            <a:r>
-              <a:rPr sz="1300" b="1">
-                <a:solidFill>
-                  <a:srgbClr val="1E508C"/>
-                </a:solidFill>
-                <a:latin typeface="Microsoft YaHei"/>
-                <a:ea typeface="Microsoft YaHei"/>
-              </a:rPr>
-              <a:t>密信态势</a:t>
-            </a:r>
-          </a:p>
-        </p:txBody>
-      </p:sp>
-      <p:sp>
-        <p:nvSpPr>
-          <p:cNvPr id="19" name="TextBox 18"/>
-          <p:cNvSpPr txBox="1"/>
-          <p:nvPr/>
-        </p:nvSpPr>
-        <p:spPr>
-          <a:xfrm>
-            <a:off x="502920" y="5558409"/>
-            <a:ext cx="3931920" cy="237744"/>
-          </a:xfrm>
-          <a:prstGeom prst="rect">
-            <a:avLst/>
-          </a:prstGeom>
-          <a:noFill/>
-        </p:spPr>
-        <p:txBody>
-          <a:bodyPr wrap="square" anchor="t" lIns="0" rIns="0" tIns="0" bIns="0">
-            <a:spAutoFit/>
-          </a:bodyPr>
-          <a:lstStyle/>
-          <a:p>
-            <a:pPr algn="ctr">
-              <a:lnSpc>
-                <a:spcPct val="100000"/>
-              </a:lnSpc>
-            </a:pPr>
-            <a:r>
-              <a:rPr sz="1000" b="0">
-                <a:solidFill>
-                  <a:srgbClr val="8A8C90"/>
-                </a:solidFill>
-                <a:latin typeface="Microsoft YaHei"/>
-                <a:ea typeface="Microsoft YaHei"/>
-              </a:rPr>
-              <a:t>登录状态 · 消息/文件收发 · 分时趋势 · 国家排行</a:t>
-            </a:r>
-          </a:p>
-        </p:txBody>
-      </p:sp>
-      <p:sp>
-        <p:nvSpPr>
-          <p:cNvPr id="20" name="Rectangle 19"/>
-          <p:cNvSpPr/>
-          <p:nvPr/>
-        </p:nvSpPr>
-        <p:spPr>
-          <a:xfrm>
-            <a:off x="4654296" y="2889504"/>
-            <a:ext cx="4041648" cy="2321433"/>
-          </a:xfrm>
-          <a:prstGeom prst="rect">
-            <a:avLst/>
-          </a:prstGeom>
-          <a:solidFill>
-            <a:srgbClr val="FFFFFF"/>
-          </a:solidFill>
-          <a:ln w="12700">
-            <a:solidFill>
-              <a:srgbClr val="C9C6C2"/>
-            </a:solidFill>
-          </a:ln>
-          <a:effectLst/>
-        </p:spPr>
-        <p:style>
-          <a:lnRef idx="1">
-            <a:schemeClr val="accent1"/>
-          </a:lnRef>
-          <a:fillRef idx="3">
-            <a:schemeClr val="accent1"/>
-          </a:fillRef>
-          <a:effectRef idx="2">
-            <a:schemeClr val="accent1"/>
-          </a:effectRef>
-          <a:fontRef idx="minor">
-            <a:schemeClr val="lt1"/>
-          </a:fontRef>
-        </p:style>
-        <p:txBody>
-          <a:bodyPr rtlCol="0" anchor="ctr"/>
-          <a:lstStyle/>
-          <a:p>
-            <a:pPr algn="ctr"/>
-          </a:p>
-        </p:txBody>
-      </p:sp>
-      <p:pic>
-        <p:nvPicPr>
-          <p:cNvPr id="21" name="Picture 20" descr="business-signing-1920.png"/>
-          <p:cNvPicPr>
-            <a:picLocks noChangeAspect="1"/>
-          </p:cNvPicPr>
-          <p:nvPr/>
-        </p:nvPicPr>
-        <p:blipFill>
-          <a:blip r:embed="rId3"/>
-          <a:stretch>
-            <a:fillRect/>
-          </a:stretch>
-        </p:blipFill>
-        <p:spPr>
-          <a:xfrm>
-            <a:off x="4709159" y="2944368"/>
-            <a:ext cx="3931920" cy="2211705"/>
-          </a:xfrm>
-          <a:prstGeom prst="rect">
-            <a:avLst/>
-          </a:prstGeom>
-        </p:spPr>
-      </p:pic>
-      <p:sp>
-        <p:nvSpPr>
-          <p:cNvPr id="22" name="TextBox 21"/>
-          <p:cNvSpPr txBox="1"/>
-          <p:nvPr/>
-        </p:nvSpPr>
-        <p:spPr>
-          <a:xfrm>
-            <a:off x="4709159" y="5302377"/>
-            <a:ext cx="3931920" cy="274320"/>
-          </a:xfrm>
-          <a:prstGeom prst="rect">
-            <a:avLst/>
-          </a:prstGeom>
-          <a:noFill/>
-        </p:spPr>
-        <p:txBody>
-          <a:bodyPr wrap="square" anchor="t" lIns="0" rIns="0" tIns="0" bIns="0">
-            <a:spAutoFit/>
-          </a:bodyPr>
-          <a:lstStyle/>
-          <a:p>
-            <a:pPr algn="ctr">
-              <a:lnSpc>
-                <a:spcPct val="100000"/>
-              </a:lnSpc>
-            </a:pPr>
-            <a:r>
-              <a:rPr sz="1300" b="1">
-                <a:solidFill>
-                  <a:srgbClr val="1E508C"/>
-                </a:solidFill>
-                <a:latin typeface="Microsoft YaHei"/>
-                <a:ea typeface="Microsoft YaHei"/>
-              </a:rPr>
-              <a:t>签阅态势</a:t>
-            </a:r>
-          </a:p>
-        </p:txBody>
-      </p:sp>
-      <p:sp>
-        <p:nvSpPr>
-          <p:cNvPr id="23" name="TextBox 22"/>
-          <p:cNvSpPr txBox="1"/>
-          <p:nvPr/>
-        </p:nvSpPr>
-        <p:spPr>
-          <a:xfrm>
-            <a:off x="4709159" y="5558409"/>
-            <a:ext cx="3931920" cy="237744"/>
-          </a:xfrm>
-          <a:prstGeom prst="rect">
-            <a:avLst/>
-          </a:prstGeom>
-          <a:noFill/>
-        </p:spPr>
-        <p:txBody>
-          <a:bodyPr wrap="square" anchor="t" lIns="0" rIns="0" tIns="0" bIns="0">
-            <a:spAutoFit/>
-          </a:bodyPr>
-          <a:lstStyle/>
-          <a:p>
-            <a:pPr algn="ctr">
-              <a:lnSpc>
-                <a:spcPct val="100000"/>
-              </a:lnSpc>
-            </a:pPr>
-            <a:r>
-              <a:rPr sz="1000" b="0">
-                <a:solidFill>
-                  <a:srgbClr val="8A8C90"/>
-                </a:solidFill>
-                <a:latin typeface="Microsoft YaHei"/>
-                <a:ea typeface="Microsoft YaHei"/>
-              </a:rPr>
-              <a:t>收到/已处理/待处理/异常退回 · 处理趋势 · 国家排行</a:t>
-            </a:r>
-          </a:p>
-        </p:txBody>
-      </p:sp>
-      <p:sp>
-        <p:nvSpPr>
-          <p:cNvPr id="24" name="TextBox 23"/>
-          <p:cNvSpPr txBox="1"/>
-          <p:nvPr/>
-        </p:nvSpPr>
-        <p:spPr>
-          <a:xfrm>
-            <a:off x="502920" y="6355080"/>
-            <a:ext cx="8138160" cy="310896"/>
-          </a:xfrm>
-          <a:prstGeom prst="rect">
-            <a:avLst/>
-          </a:prstGeom>
-          <a:noFill/>
-        </p:spPr>
-        <p:txBody>
-          <a:bodyPr wrap="square" anchor="t" lIns="0" rIns="0" tIns="0" bIns="0">
+          <a:bodyPr wrap="square" lIns="0" rIns="0" tIns="0" bIns="0">
             <a:spAutoFit/>
           </a:bodyPr>
           <a:lstStyle/>
@@ -3998,14 +3479,13 @@
               </a:lnSpc>
             </a:pPr>
             <a:r>
-              <a:rPr sz="950" b="0">
+              <a:rPr sz="1050" b="0">
                 <a:solidFill>
-                  <a:srgbClr val="8A8C90"/>
+                  <a:srgbClr val="9FB3CC"/>
                 </a:solidFill>
                 <a:latin typeface="Microsoft YaHei"/>
-                <a:ea typeface="Microsoft YaHei"/>
               </a:rPr>
-              <a:t>数据为模拟演示场景，与综合态势页、人员装备详情一致；指标口径闭合：密信 20 − 3 = 17，签阅 68 = 54 + 11 + 3，链路利用率 = max(上下行) / 50 Mbps。</a:t>
+              <a:t>数据为模拟演示场景，与综合态势页口径一致：业务量 132 万、成功率 99.3%、高峰时延 420ms、文件传输 8.6TB；链路利用率 = max(上下行) / 50 Mbps。</a:t>
             </a:r>
           </a:p>
         </p:txBody>

--- a/docs/演示/业务态势.pptx
+++ b/docs/演示/业务态势.pptx
@@ -3162,11 +3162,7 @@
           </a:bodyPr>
           <a:lstStyle/>
           <a:p>
-            <a:pPr algn="l">
-              <a:lnSpc>
-                <a:spcPct val="100000"/>
-              </a:lnSpc>
-            </a:pPr>
+            <a:pPr algn="l"/>
             <a:r>
               <a:rPr sz="2200" b="1">
                 <a:solidFill>
@@ -3174,7 +3170,7 @@
                 </a:solidFill>
                 <a:latin typeface="Microsoft YaHei"/>
               </a:rPr>
-              <a:t>业务态势　·　密信 / 签阅 / 境外通联</a:t>
+              <a:t>业务态势　·　密信 / 签阅 / 系统流量</a:t>
             </a:r>
           </a:p>
         </p:txBody>
@@ -3201,11 +3197,7 @@
           </a:bodyPr>
           <a:lstStyle/>
           <a:p>
-            <a:pPr algn="l">
-              <a:lnSpc>
-                <a:spcPct val="100000"/>
-              </a:lnSpc>
-            </a:pPr>
+            <a:pPr algn="l"/>
             <a:r>
               <a:rPr sz="1300" b="0">
                 <a:solidFill>
@@ -3213,7 +3205,7 @@
                 </a:solidFill>
                 <a:latin typeface="Microsoft YaHei"/>
               </a:rPr>
-              <a:t>业务主题态势聚焦密信传输、签阅流转与境外通联三大核心业务，提供业务量统计、流转状态追踪与链路健康监测。</a:t>
+              <a:t>业务主题态势聚焦密信传输、签阅流转与系统流量三大核心业务，首页卡片可一键下钻并返回。</a:t>
             </a:r>
           </a:p>
         </p:txBody>
@@ -3240,11 +3232,7 @@
           </a:bodyPr>
           <a:lstStyle/>
           <a:p>
-            <a:pPr algn="l">
-              <a:lnSpc>
-                <a:spcPct val="100000"/>
-              </a:lnSpc>
-            </a:pPr>
+            <a:pPr algn="l"/>
             <a:r>
               <a:rPr sz="1300" b="1">
                 <a:solidFill>
@@ -3256,11 +3244,7 @@
             </a:r>
           </a:p>
           <a:p>
-            <a:pPr algn="l">
-              <a:lnSpc>
-                <a:spcPct val="100000"/>
-              </a:lnSpc>
-            </a:pPr>
+            <a:pPr algn="l"/>
             <a:r>
               <a:rPr sz="1300" b="0">
                 <a:solidFill>
@@ -3268,7 +3252,7 @@
                 </a:solidFill>
                 <a:latin typeface="Microsoft YaHei"/>
               </a:rPr>
-              <a:t>密信态势：用户登录/登出状态监测，消息与文件收发量统计，分时趋势及国家排行实时展示；</a:t>
+              <a:t>密信态势：消息与文件收发量统计、当前登录用户、分时趋势及用户/部门收发排名实时展示；</a:t>
             </a:r>
           </a:p>
         </p:txBody>
@@ -3295,11 +3279,7 @@
           </a:bodyPr>
           <a:lstStyle/>
           <a:p>
-            <a:pPr algn="l">
-              <a:lnSpc>
-                <a:spcPct val="100000"/>
-              </a:lnSpc>
-            </a:pPr>
+            <a:pPr algn="l"/>
             <a:r>
               <a:rPr sz="1300" b="1">
                 <a:solidFill>
@@ -3311,11 +3291,7 @@
             </a:r>
           </a:p>
           <a:p>
-            <a:pPr algn="l">
-              <a:lnSpc>
-                <a:spcPct val="100000"/>
-              </a:lnSpc>
-            </a:pPr>
+            <a:pPr algn="l"/>
             <a:r>
               <a:rPr sz="1300" b="0">
                 <a:solidFill>
@@ -3323,7 +3299,7 @@
                 </a:solidFill>
                 <a:latin typeface="Microsoft YaHei"/>
               </a:rPr>
-              <a:t>签阅态势：收到、已处理、待处理、异常/退回流转状态统计，处理趋势及国家排行可视化；</a:t>
+              <a:t>签阅态势：收到、已处理、待处理、异常/退回流转状态统计，人员与部门处理排名可视化；</a:t>
             </a:r>
           </a:p>
         </p:txBody>
@@ -3350,11 +3326,7 @@
           </a:bodyPr>
           <a:lstStyle/>
           <a:p>
-            <a:pPr algn="l">
-              <a:lnSpc>
-                <a:spcPct val="100000"/>
-              </a:lnSpc>
-            </a:pPr>
+            <a:pPr algn="l"/>
             <a:r>
               <a:rPr sz="1300" b="1">
                 <a:solidFill>
@@ -3366,11 +3338,7 @@
             </a:r>
           </a:p>
           <a:p>
-            <a:pPr algn="l">
-              <a:lnSpc>
-                <a:spcPct val="100000"/>
-              </a:lnSpc>
-            </a:pPr>
+            <a:pPr algn="l"/>
             <a:r>
               <a:rPr sz="1300" b="0">
                 <a:solidFill>
@@ -3378,7 +3346,7 @@
                 </a:solidFill>
                 <a:latin typeface="Microsoft YaHei"/>
               </a:rPr>
-              <a:t>境外通联：共享链路（50 Mbps）上下行速率、利用率、累计流量与峰值监测，国家流量占比展示。</a:t>
+              <a:t>系统流量：业务系统吞吐排名与区域链路流量排名，各系统今日流量实时累计。</a:t>
             </a:r>
           </a:p>
         </p:txBody>
@@ -3429,7 +3397,7 @@
       </p:sp>
       <p:pic>
         <p:nvPicPr>
-          <p:cNvPr id="9" name="Picture 8" descr="business-1920.png"/>
+          <p:cNvPr id="9" name="Picture 8" descr="business-message-1920.png"/>
           <p:cNvPicPr>
             <a:picLocks noChangeAspect="1"/>
           </p:cNvPicPr>
@@ -3473,11 +3441,7 @@
           </a:bodyPr>
           <a:lstStyle/>
           <a:p>
-            <a:pPr algn="l">
-              <a:lnSpc>
-                <a:spcPct val="100000"/>
-              </a:lnSpc>
-            </a:pPr>
+            <a:pPr algn="l"/>
             <a:r>
               <a:rPr sz="1050" b="0">
                 <a:solidFill>
@@ -3485,7 +3449,7 @@
                 </a:solidFill>
                 <a:latin typeface="Microsoft YaHei"/>
               </a:rPr>
-              <a:t>数据为模拟演示场景，与综合态势页口径一致：业务量 132 万、成功率 99.3%、高峰时延 420ms、文件传输 8.6TB；链路利用率 = max(上下行) / 50 Mbps。</a:t>
+              <a:t>数据为模拟演示场景，实时滚动更新：签阅收到 68 份、处理率 79.4%、待处理 11 份、异常退回 3 份。</a:t>
             </a:r>
           </a:p>
         </p:txBody>
